--- a/knowledge/Productivity/Fan_Ceiling_Showcase.pptx
+++ b/knowledge/Productivity/Fan_Ceiling_Showcase.pptx
@@ -3165,14 +3165,14 @@
           <p:nvPr/>
         </p:nvSpPr>
         <p:spPr>
-          <a:xfrm rot="13500000">
-            <a:off x="6675120" y="1463040"/>
-            <a:ext cx="9509760" cy="9509760"/>
+          <a:xfrm rot="11700000">
+            <a:off x="6888175" y="1554480"/>
+            <a:ext cx="10607040" cy="10607040"/>
           </a:xfrm>
           <a:prstGeom prst="blockArc">
             <a:avLst>
               <a:gd name="adj1" fmla="val 0"/>
-              <a:gd name="adj2" fmla="val 2400000"/>
+              <a:gd name="adj2" fmla="val 2500000"/>
               <a:gd name="adj3" fmla="val 28000"/>
             </a:avLst>
           </a:prstGeom>
@@ -3217,14 +3217,14 @@
           <p:nvPr/>
         </p:nvSpPr>
         <p:spPr>
-          <a:xfrm rot="13500000">
-            <a:off x="6675120" y="1463040"/>
-            <a:ext cx="9509760" cy="9509760"/>
+          <a:xfrm rot="11700000">
+            <a:off x="6888175" y="1554480"/>
+            <a:ext cx="10607040" cy="10607040"/>
           </a:xfrm>
           <a:prstGeom prst="blockArc">
             <a:avLst>
               <a:gd name="adj1" fmla="val 0"/>
-              <a:gd name="adj2" fmla="val 2400000"/>
+              <a:gd name="adj2" fmla="val 2500000"/>
               <a:gd name="adj3" fmla="val 28000"/>
             </a:avLst>
           </a:prstGeom>
@@ -3269,14 +3269,14 @@
           <p:nvPr/>
         </p:nvSpPr>
         <p:spPr>
-          <a:xfrm rot="13500000">
-            <a:off x="6675120" y="1463040"/>
-            <a:ext cx="9509760" cy="9509760"/>
+          <a:xfrm rot="11700000">
+            <a:off x="6888175" y="1554480"/>
+            <a:ext cx="10607040" cy="10607040"/>
           </a:xfrm>
           <a:prstGeom prst="blockArc">
             <a:avLst>
               <a:gd name="adj1" fmla="val 0"/>
-              <a:gd name="adj2" fmla="val 2400000"/>
+              <a:gd name="adj2" fmla="val 2500000"/>
               <a:gd name="adj3" fmla="val 28000"/>
             </a:avLst>
           </a:prstGeom>
@@ -3321,14 +3321,14 @@
           <p:nvPr/>
         </p:nvSpPr>
         <p:spPr>
-          <a:xfrm rot="13500000">
-            <a:off x="6675120" y="1463040"/>
-            <a:ext cx="9509760" cy="9509760"/>
+          <a:xfrm rot="11700000">
+            <a:off x="6888175" y="1554480"/>
+            <a:ext cx="10607040" cy="10607040"/>
           </a:xfrm>
           <a:prstGeom prst="blockArc">
             <a:avLst>
               <a:gd name="adj1" fmla="val 0"/>
-              <a:gd name="adj2" fmla="val 2400000"/>
+              <a:gd name="adj2" fmla="val 2500000"/>
               <a:gd name="adj3" fmla="val 28000"/>
             </a:avLst>
           </a:prstGeom>
@@ -3373,14 +3373,14 @@
           <p:nvPr/>
         </p:nvSpPr>
         <p:spPr>
-          <a:xfrm rot="13500000">
-            <a:off x="6675120" y="1463040"/>
-            <a:ext cx="9509760" cy="9509760"/>
+          <a:xfrm rot="11700000">
+            <a:off x="6888175" y="1554480"/>
+            <a:ext cx="10607040" cy="10607040"/>
           </a:xfrm>
           <a:prstGeom prst="blockArc">
             <a:avLst>
               <a:gd name="adj1" fmla="val 0"/>
-              <a:gd name="adj2" fmla="val 2400000"/>
+              <a:gd name="adj2" fmla="val 2500000"/>
               <a:gd name="adj3" fmla="val 28000"/>
             </a:avLst>
           </a:prstGeom>
@@ -3425,14 +3425,14 @@
           <p:nvPr/>
         </p:nvSpPr>
         <p:spPr>
-          <a:xfrm rot="13500000">
-            <a:off x="6675120" y="1463040"/>
-            <a:ext cx="9509760" cy="9509760"/>
+          <a:xfrm rot="11700000">
+            <a:off x="6888175" y="1554480"/>
+            <a:ext cx="10607040" cy="10607040"/>
           </a:xfrm>
           <a:prstGeom prst="blockArc">
             <a:avLst>
               <a:gd name="adj1" fmla="val 0"/>
-              <a:gd name="adj2" fmla="val 2400000"/>
+              <a:gd name="adj2" fmla="val 2500000"/>
               <a:gd name="adj3" fmla="val 28000"/>
             </a:avLst>
           </a:prstGeom>
@@ -3477,14 +3477,14 @@
           <p:nvPr/>
         </p:nvSpPr>
         <p:spPr>
-          <a:xfrm rot="2700000">
-            <a:off x="-3108960" y="-3200400"/>
-            <a:ext cx="7680960" cy="7680960"/>
+          <a:xfrm rot="900000">
+            <a:off x="-4389120" y="-4389120"/>
+            <a:ext cx="8778240" cy="8778240"/>
           </a:xfrm>
           <a:prstGeom prst="blockArc">
             <a:avLst>
               <a:gd name="adj1" fmla="val 0"/>
-              <a:gd name="adj2" fmla="val 2400000"/>
+              <a:gd name="adj2" fmla="val 2500000"/>
               <a:gd name="adj3" fmla="val 28000"/>
             </a:avLst>
           </a:prstGeom>
@@ -3529,14 +3529,14 @@
           <p:nvPr/>
         </p:nvSpPr>
         <p:spPr>
-          <a:xfrm rot="2700000">
-            <a:off x="-3108960" y="-3200400"/>
-            <a:ext cx="7680960" cy="7680960"/>
+          <a:xfrm rot="900000">
+            <a:off x="-4389120" y="-4389120"/>
+            <a:ext cx="8778240" cy="8778240"/>
           </a:xfrm>
           <a:prstGeom prst="blockArc">
             <a:avLst>
               <a:gd name="adj1" fmla="val 0"/>
-              <a:gd name="adj2" fmla="val 2400000"/>
+              <a:gd name="adj2" fmla="val 2500000"/>
               <a:gd name="adj3" fmla="val 28000"/>
             </a:avLst>
           </a:prstGeom>
@@ -3581,14 +3581,14 @@
           <p:nvPr/>
         </p:nvSpPr>
         <p:spPr>
-          <a:xfrm rot="2700000">
-            <a:off x="-3108960" y="-3200400"/>
-            <a:ext cx="7680960" cy="7680960"/>
+          <a:xfrm rot="900000">
+            <a:off x="-4389120" y="-4389120"/>
+            <a:ext cx="8778240" cy="8778240"/>
           </a:xfrm>
           <a:prstGeom prst="blockArc">
             <a:avLst>
               <a:gd name="adj1" fmla="val 0"/>
-              <a:gd name="adj2" fmla="val 2400000"/>
+              <a:gd name="adj2" fmla="val 2500000"/>
               <a:gd name="adj3" fmla="val 28000"/>
             </a:avLst>
           </a:prstGeom>
@@ -3633,14 +3633,14 @@
           <p:nvPr/>
         </p:nvSpPr>
         <p:spPr>
-          <a:xfrm rot="2700000">
-            <a:off x="-3108960" y="-3200400"/>
-            <a:ext cx="7680960" cy="7680960"/>
+          <a:xfrm rot="900000">
+            <a:off x="-4389120" y="-4389120"/>
+            <a:ext cx="8778240" cy="8778240"/>
           </a:xfrm>
           <a:prstGeom prst="blockArc">
             <a:avLst>
               <a:gd name="adj1" fmla="val 0"/>
-              <a:gd name="adj2" fmla="val 2400000"/>
+              <a:gd name="adj2" fmla="val 2500000"/>
               <a:gd name="adj3" fmla="val 28000"/>
             </a:avLst>
           </a:prstGeom>
@@ -3685,14 +3685,14 @@
           <p:nvPr/>
         </p:nvSpPr>
         <p:spPr>
-          <a:xfrm rot="2700000">
-            <a:off x="-3108960" y="-3200400"/>
-            <a:ext cx="7680960" cy="7680960"/>
+          <a:xfrm rot="900000">
+            <a:off x="-4389120" y="-4389120"/>
+            <a:ext cx="8778240" cy="8778240"/>
           </a:xfrm>
           <a:prstGeom prst="blockArc">
             <a:avLst>
               <a:gd name="adj1" fmla="val 0"/>
-              <a:gd name="adj2" fmla="val 2400000"/>
+              <a:gd name="adj2" fmla="val 2500000"/>
               <a:gd name="adj3" fmla="val 28000"/>
             </a:avLst>
           </a:prstGeom>
@@ -3737,14 +3737,14 @@
           <p:nvPr/>
         </p:nvSpPr>
         <p:spPr>
-          <a:xfrm rot="2700000">
-            <a:off x="-3108960" y="-3200400"/>
-            <a:ext cx="7680960" cy="7680960"/>
+          <a:xfrm rot="900000">
+            <a:off x="-4389120" y="-4389120"/>
+            <a:ext cx="8778240" cy="8778240"/>
           </a:xfrm>
           <a:prstGeom prst="blockArc">
             <a:avLst>
               <a:gd name="adj1" fmla="val 0"/>
-              <a:gd name="adj2" fmla="val 2400000"/>
+              <a:gd name="adj2" fmla="val 2500000"/>
               <a:gd name="adj3" fmla="val 28000"/>
             </a:avLst>
           </a:prstGeom>
@@ -3790,8 +3790,8 @@
         </p:nvSpPr>
         <p:spPr>
           <a:xfrm>
-            <a:off x="11109960" y="5897880"/>
-            <a:ext cx="640080" cy="640080"/>
+            <a:off x="11825935" y="6492240"/>
+            <a:ext cx="731520" cy="731520"/>
           </a:xfrm>
           <a:prstGeom prst="ellipse">
             <a:avLst/>
@@ -3835,8 +3835,8 @@
         </p:nvSpPr>
         <p:spPr>
           <a:xfrm>
-            <a:off x="457200" y="365760"/>
-            <a:ext cx="548640" cy="548640"/>
+            <a:off x="-320040" y="-320040"/>
+            <a:ext cx="640080" cy="640080"/>
           </a:xfrm>
           <a:prstGeom prst="ellipse">
             <a:avLst/>
@@ -4079,14 +4079,14 @@
           <p:nvPr/>
         </p:nvSpPr>
         <p:spPr>
-          <a:xfrm rot="18000000">
-            <a:off x="6675120" y="1463040"/>
-            <a:ext cx="9509760" cy="9509760"/>
+          <a:xfrm rot="16200000">
+            <a:off x="6888175" y="1554480"/>
+            <a:ext cx="10607040" cy="10607040"/>
           </a:xfrm>
           <a:prstGeom prst="blockArc">
             <a:avLst>
               <a:gd name="adj1" fmla="val 0"/>
-              <a:gd name="adj2" fmla="val 2400000"/>
+              <a:gd name="adj2" fmla="val 2500000"/>
               <a:gd name="adj3" fmla="val 28000"/>
             </a:avLst>
           </a:prstGeom>
@@ -4102,9 +4102,9 @@
             </a:stretch>
           </a:blipFill>
           <a:effectLst>
-            <a:outerShdw blurRad="50000" dist="25000" dir="2700000" algn="tl" rotWithShape="0">
+            <a:outerShdw blurRad="50800" dist="38100" dir="8100000" algn="tl" rotWithShape="0">
               <a:srgbClr val="000000">
-                <a:alpha val="22000"/>
+                <a:alpha val="25000"/>
               </a:srgbClr>
             </a:outerShdw>
           </a:effectLst>
@@ -4138,14 +4138,14 @@
           <p:nvPr/>
         </p:nvSpPr>
         <p:spPr>
-          <a:xfrm rot="17100000">
-            <a:off x="6675120" y="1463040"/>
-            <a:ext cx="9509760" cy="9509760"/>
+          <a:xfrm rot="15300000">
+            <a:off x="6888175" y="1554480"/>
+            <a:ext cx="10607040" cy="10607040"/>
           </a:xfrm>
           <a:prstGeom prst="blockArc">
             <a:avLst>
               <a:gd name="adj1" fmla="val 0"/>
-              <a:gd name="adj2" fmla="val 2400000"/>
+              <a:gd name="adj2" fmla="val 2500000"/>
               <a:gd name="adj3" fmla="val 28000"/>
             </a:avLst>
           </a:prstGeom>
@@ -4161,9 +4161,9 @@
             </a:stretch>
           </a:blipFill>
           <a:effectLst>
-            <a:outerShdw blurRad="50000" dist="25000" dir="2700000" algn="tl" rotWithShape="0">
+            <a:outerShdw blurRad="50800" dist="38100" dir="8100000" algn="tl" rotWithShape="0">
               <a:srgbClr val="000000">
-                <a:alpha val="22000"/>
+                <a:alpha val="25000"/>
               </a:srgbClr>
             </a:outerShdw>
           </a:effectLst>
@@ -4197,14 +4197,14 @@
           <p:nvPr/>
         </p:nvSpPr>
         <p:spPr>
-          <a:xfrm rot="16200000">
-            <a:off x="6675120" y="1463040"/>
-            <a:ext cx="9509760" cy="9509760"/>
+          <a:xfrm rot="14400000">
+            <a:off x="6888175" y="1554480"/>
+            <a:ext cx="10607040" cy="10607040"/>
           </a:xfrm>
           <a:prstGeom prst="blockArc">
             <a:avLst>
               <a:gd name="adj1" fmla="val 0"/>
-              <a:gd name="adj2" fmla="val 2400000"/>
+              <a:gd name="adj2" fmla="val 2500000"/>
               <a:gd name="adj3" fmla="val 28000"/>
             </a:avLst>
           </a:prstGeom>
@@ -4220,9 +4220,9 @@
             </a:stretch>
           </a:blipFill>
           <a:effectLst>
-            <a:outerShdw blurRad="50000" dist="25000" dir="2700000" algn="tl" rotWithShape="0">
+            <a:outerShdw blurRad="50800" dist="38100" dir="8100000" algn="tl" rotWithShape="0">
               <a:srgbClr val="000000">
-                <a:alpha val="22000"/>
+                <a:alpha val="25000"/>
               </a:srgbClr>
             </a:outerShdw>
           </a:effectLst>
@@ -4256,14 +4256,14 @@
           <p:nvPr/>
         </p:nvSpPr>
         <p:spPr>
-          <a:xfrm rot="15300000">
-            <a:off x="6675120" y="1463040"/>
-            <a:ext cx="9509760" cy="9509760"/>
+          <a:xfrm rot="13500000">
+            <a:off x="6888175" y="1554480"/>
+            <a:ext cx="10607040" cy="10607040"/>
           </a:xfrm>
           <a:prstGeom prst="blockArc">
             <a:avLst>
               <a:gd name="adj1" fmla="val 0"/>
-              <a:gd name="adj2" fmla="val 2400000"/>
+              <a:gd name="adj2" fmla="val 2500000"/>
               <a:gd name="adj3" fmla="val 28000"/>
             </a:avLst>
           </a:prstGeom>
@@ -4279,9 +4279,9 @@
             </a:stretch>
           </a:blipFill>
           <a:effectLst>
-            <a:outerShdw blurRad="50000" dist="25000" dir="2700000" algn="tl" rotWithShape="0">
+            <a:outerShdw blurRad="50800" dist="38100" dir="8100000" algn="tl" rotWithShape="0">
               <a:srgbClr val="000000">
-                <a:alpha val="22000"/>
+                <a:alpha val="25000"/>
               </a:srgbClr>
             </a:outerShdw>
           </a:effectLst>
@@ -4315,14 +4315,14 @@
           <p:nvPr/>
         </p:nvSpPr>
         <p:spPr>
-          <a:xfrm rot="14400000">
-            <a:off x="6675120" y="1463040"/>
-            <a:ext cx="9509760" cy="9509760"/>
+          <a:xfrm rot="12600000">
+            <a:off x="6888175" y="1554480"/>
+            <a:ext cx="10607040" cy="10607040"/>
           </a:xfrm>
           <a:prstGeom prst="blockArc">
             <a:avLst>
               <a:gd name="adj1" fmla="val 0"/>
-              <a:gd name="adj2" fmla="val 2400000"/>
+              <a:gd name="adj2" fmla="val 2500000"/>
               <a:gd name="adj3" fmla="val 28000"/>
             </a:avLst>
           </a:prstGeom>
@@ -4338,9 +4338,9 @@
             </a:stretch>
           </a:blipFill>
           <a:effectLst>
-            <a:outerShdw blurRad="50000" dist="25000" dir="2700000" algn="tl" rotWithShape="0">
+            <a:outerShdw blurRad="50800" dist="38100" dir="8100000" algn="tl" rotWithShape="0">
               <a:srgbClr val="000000">
-                <a:alpha val="22000"/>
+                <a:alpha val="25000"/>
               </a:srgbClr>
             </a:outerShdw>
           </a:effectLst>
@@ -4374,14 +4374,14 @@
           <p:nvPr/>
         </p:nvSpPr>
         <p:spPr>
-          <a:xfrm rot="13500000">
-            <a:off x="6675120" y="1463040"/>
-            <a:ext cx="9509760" cy="9509760"/>
+          <a:xfrm rot="11700000">
+            <a:off x="6888175" y="1554480"/>
+            <a:ext cx="10607040" cy="10607040"/>
           </a:xfrm>
           <a:prstGeom prst="blockArc">
             <a:avLst>
               <a:gd name="adj1" fmla="val 0"/>
-              <a:gd name="adj2" fmla="val 2400000"/>
+              <a:gd name="adj2" fmla="val 2500000"/>
               <a:gd name="adj3" fmla="val 28000"/>
             </a:avLst>
           </a:prstGeom>
@@ -4397,9 +4397,9 @@
             </a:stretch>
           </a:blipFill>
           <a:effectLst>
-            <a:outerShdw blurRad="50000" dist="25000" dir="2700000" algn="tl" rotWithShape="0">
+            <a:outerShdw blurRad="50800" dist="38100" dir="8100000" algn="tl" rotWithShape="0">
               <a:srgbClr val="000000">
-                <a:alpha val="22000"/>
+                <a:alpha val="25000"/>
               </a:srgbClr>
             </a:outerShdw>
           </a:effectLst>
@@ -4433,14 +4433,14 @@
           <p:nvPr/>
         </p:nvSpPr>
         <p:spPr>
-          <a:xfrm rot="7200000">
-            <a:off x="-3108960" y="-3200400"/>
-            <a:ext cx="7680960" cy="7680960"/>
+          <a:xfrm rot="5400000">
+            <a:off x="-4389120" y="-4389120"/>
+            <a:ext cx="8778240" cy="8778240"/>
           </a:xfrm>
           <a:prstGeom prst="blockArc">
             <a:avLst>
               <a:gd name="adj1" fmla="val 0"/>
-              <a:gd name="adj2" fmla="val 2400000"/>
+              <a:gd name="adj2" fmla="val 2500000"/>
               <a:gd name="adj3" fmla="val 28000"/>
             </a:avLst>
           </a:prstGeom>
@@ -4456,9 +4456,9 @@
             </a:stretch>
           </a:blipFill>
           <a:effectLst>
-            <a:outerShdw blurRad="50000" dist="25000" dir="2700000" algn="tl" rotWithShape="0">
+            <a:outerShdw blurRad="50800" dist="38100" dir="8100000" algn="tl" rotWithShape="0">
               <a:srgbClr val="000000">
-                <a:alpha val="22000"/>
+                <a:alpha val="25000"/>
               </a:srgbClr>
             </a:outerShdw>
           </a:effectLst>
@@ -4492,14 +4492,14 @@
           <p:nvPr/>
         </p:nvSpPr>
         <p:spPr>
-          <a:xfrm rot="6300000">
-            <a:off x="-3108960" y="-3200400"/>
-            <a:ext cx="7680960" cy="7680960"/>
+          <a:xfrm rot="4500000">
+            <a:off x="-4389120" y="-4389120"/>
+            <a:ext cx="8778240" cy="8778240"/>
           </a:xfrm>
           <a:prstGeom prst="blockArc">
             <a:avLst>
               <a:gd name="adj1" fmla="val 0"/>
-              <a:gd name="adj2" fmla="val 2400000"/>
+              <a:gd name="adj2" fmla="val 2500000"/>
               <a:gd name="adj3" fmla="val 28000"/>
             </a:avLst>
           </a:prstGeom>
@@ -4515,9 +4515,9 @@
             </a:stretch>
           </a:blipFill>
           <a:effectLst>
-            <a:outerShdw blurRad="50000" dist="25000" dir="2700000" algn="tl" rotWithShape="0">
+            <a:outerShdw blurRad="50800" dist="38100" dir="8100000" algn="tl" rotWithShape="0">
               <a:srgbClr val="000000">
-                <a:alpha val="22000"/>
+                <a:alpha val="25000"/>
               </a:srgbClr>
             </a:outerShdw>
           </a:effectLst>
@@ -4551,14 +4551,14 @@
           <p:nvPr/>
         </p:nvSpPr>
         <p:spPr>
-          <a:xfrm rot="5400000">
-            <a:off x="-3108960" y="-3200400"/>
-            <a:ext cx="7680960" cy="7680960"/>
+          <a:xfrm rot="3600000">
+            <a:off x="-4389120" y="-4389120"/>
+            <a:ext cx="8778240" cy="8778240"/>
           </a:xfrm>
           <a:prstGeom prst="blockArc">
             <a:avLst>
               <a:gd name="adj1" fmla="val 0"/>
-              <a:gd name="adj2" fmla="val 2400000"/>
+              <a:gd name="adj2" fmla="val 2500000"/>
               <a:gd name="adj3" fmla="val 28000"/>
             </a:avLst>
           </a:prstGeom>
@@ -4574,9 +4574,9 @@
             </a:stretch>
           </a:blipFill>
           <a:effectLst>
-            <a:outerShdw blurRad="50000" dist="25000" dir="2700000" algn="tl" rotWithShape="0">
+            <a:outerShdw blurRad="50800" dist="38100" dir="8100000" algn="tl" rotWithShape="0">
               <a:srgbClr val="000000">
-                <a:alpha val="22000"/>
+                <a:alpha val="25000"/>
               </a:srgbClr>
             </a:outerShdw>
           </a:effectLst>
@@ -4610,14 +4610,14 @@
           <p:nvPr/>
         </p:nvSpPr>
         <p:spPr>
-          <a:xfrm rot="4500000">
-            <a:off x="-3108960" y="-3200400"/>
-            <a:ext cx="7680960" cy="7680960"/>
+          <a:xfrm rot="2700000">
+            <a:off x="-4389120" y="-4389120"/>
+            <a:ext cx="8778240" cy="8778240"/>
           </a:xfrm>
           <a:prstGeom prst="blockArc">
             <a:avLst>
               <a:gd name="adj1" fmla="val 0"/>
-              <a:gd name="adj2" fmla="val 2400000"/>
+              <a:gd name="adj2" fmla="val 2500000"/>
               <a:gd name="adj3" fmla="val 28000"/>
             </a:avLst>
           </a:prstGeom>
@@ -4633,9 +4633,9 @@
             </a:stretch>
           </a:blipFill>
           <a:effectLst>
-            <a:outerShdw blurRad="50000" dist="25000" dir="2700000" algn="tl" rotWithShape="0">
+            <a:outerShdw blurRad="50800" dist="38100" dir="8100000" algn="tl" rotWithShape="0">
               <a:srgbClr val="000000">
-                <a:alpha val="22000"/>
+                <a:alpha val="25000"/>
               </a:srgbClr>
             </a:outerShdw>
           </a:effectLst>
@@ -4669,14 +4669,14 @@
           <p:nvPr/>
         </p:nvSpPr>
         <p:spPr>
-          <a:xfrm rot="3600000">
-            <a:off x="-3108960" y="-3200400"/>
-            <a:ext cx="7680960" cy="7680960"/>
+          <a:xfrm rot="1800000">
+            <a:off x="-4389120" y="-4389120"/>
+            <a:ext cx="8778240" cy="8778240"/>
           </a:xfrm>
           <a:prstGeom prst="blockArc">
             <a:avLst>
               <a:gd name="adj1" fmla="val 0"/>
-              <a:gd name="adj2" fmla="val 2400000"/>
+              <a:gd name="adj2" fmla="val 2500000"/>
               <a:gd name="adj3" fmla="val 28000"/>
             </a:avLst>
           </a:prstGeom>
@@ -4692,9 +4692,9 @@
             </a:stretch>
           </a:blipFill>
           <a:effectLst>
-            <a:outerShdw blurRad="50000" dist="25000" dir="2700000" algn="tl" rotWithShape="0">
+            <a:outerShdw blurRad="50800" dist="38100" dir="8100000" algn="tl" rotWithShape="0">
               <a:srgbClr val="000000">
-                <a:alpha val="22000"/>
+                <a:alpha val="25000"/>
               </a:srgbClr>
             </a:outerShdw>
           </a:effectLst>
@@ -4728,14 +4728,14 @@
           <p:nvPr/>
         </p:nvSpPr>
         <p:spPr>
-          <a:xfrm rot="2700000">
-            <a:off x="-3108960" y="-3200400"/>
-            <a:ext cx="7680960" cy="7680960"/>
+          <a:xfrm rot="900000">
+            <a:off x="-4389120" y="-4389120"/>
+            <a:ext cx="8778240" cy="8778240"/>
           </a:xfrm>
           <a:prstGeom prst="blockArc">
             <a:avLst>
               <a:gd name="adj1" fmla="val 0"/>
-              <a:gd name="adj2" fmla="val 2400000"/>
+              <a:gd name="adj2" fmla="val 2500000"/>
               <a:gd name="adj3" fmla="val 28000"/>
             </a:avLst>
           </a:prstGeom>
@@ -4751,9 +4751,9 @@
             </a:stretch>
           </a:blipFill>
           <a:effectLst>
-            <a:outerShdw blurRad="50000" dist="25000" dir="2700000" algn="tl" rotWithShape="0">
+            <a:outerShdw blurRad="50800" dist="38100" dir="8100000" algn="tl" rotWithShape="0">
               <a:srgbClr val="000000">
-                <a:alpha val="22000"/>
+                <a:alpha val="25000"/>
               </a:srgbClr>
             </a:outerShdw>
           </a:effectLst>
@@ -4788,8 +4788,8 @@
         </p:nvSpPr>
         <p:spPr>
           <a:xfrm>
-            <a:off x="11109960" y="5897880"/>
-            <a:ext cx="640080" cy="640080"/>
+            <a:off x="11825935" y="6492240"/>
+            <a:ext cx="731520" cy="731520"/>
           </a:xfrm>
           <a:prstGeom prst="ellipse">
             <a:avLst/>
@@ -4833,8 +4833,8 @@
         </p:nvSpPr>
         <p:spPr>
           <a:xfrm>
-            <a:off x="457200" y="365760"/>
-            <a:ext cx="548640" cy="548640"/>
+            <a:off x="-320040" y="-320040"/>
+            <a:ext cx="640080" cy="640080"/>
           </a:xfrm>
           <a:prstGeom prst="ellipse">
             <a:avLst/>

--- a/knowledge/Productivity/Fan_Ceiling_Showcase.pptx
+++ b/knowledge/Productivity/Fan_Ceiling_Showcase.pptx
@@ -3115,65 +3115,19 @@
       </p:pic>
       <p:sp>
         <p:nvSpPr>
-          <p:cNvPr id="3" name="!!FrostedVeil"/>
+          <p:cNvPr id="3" name="!!BRFan1"/>
           <p:cNvSpPr/>
           <p:nvPr/>
         </p:nvSpPr>
         <p:spPr>
-          <a:xfrm>
-            <a:off x="0" y="0"/>
-            <a:ext cx="12191695" cy="6858000"/>
-          </a:xfrm>
-          <a:prstGeom prst="rect">
-            <a:avLst/>
-          </a:prstGeom>
-          <a:ln>
-            <a:noFill/>
-          </a:ln>
-          <a:solidFill>
-            <a:srgbClr val="F8FAF6">
-              <a:alpha val="35000"/>
-            </a:srgbClr>
-          </a:solidFill>
-        </p:spPr>
-        <p:style>
-          <a:lnRef idx="1">
-            <a:schemeClr val="accent1"/>
-          </a:lnRef>
-          <a:fillRef idx="3">
-            <a:schemeClr val="accent1"/>
-          </a:fillRef>
-          <a:effectRef idx="2">
-            <a:schemeClr val="accent1"/>
-          </a:effectRef>
-          <a:fontRef idx="minor">
-            <a:schemeClr val="lt1"/>
-          </a:fontRef>
-        </p:style>
-        <p:txBody>
-          <a:bodyPr rtlCol="0" anchor="ctr"/>
-          <a:lstStyle/>
-          <a:p>
-            <a:pPr algn="ctr"/>
-          </a:p>
-        </p:txBody>
-      </p:sp>
-      <p:sp>
-        <p:nvSpPr>
-          <p:cNvPr id="4" name="!!BRFan1"/>
-          <p:cNvSpPr/>
-          <p:nvPr/>
-        </p:nvSpPr>
-        <p:spPr>
-          <a:xfrm rot="11700000">
+          <a:xfrm rot="10800000">
             <a:off x="6888175" y="1554480"/>
             <a:ext cx="10607040" cy="10607040"/>
           </a:xfrm>
-          <a:prstGeom prst="blockArc">
+          <a:prstGeom prst="pie">
             <a:avLst>
               <a:gd name="adj1" fmla="val 0"/>
-              <a:gd name="adj2" fmla="val 2500000"/>
-              <a:gd name="adj3" fmla="val 28000"/>
+              <a:gd name="adj2" fmla="val 900000"/>
             </a:avLst>
           </a:prstGeom>
           <a:ln w="9525">
@@ -3184,7 +3138,7 @@
           <a:blipFill rotWithShape="0">
             <a:blip r:embed="rId2"/>
             <a:stretch>
-              <a:fillRect/>
+              <a:fillRect l="-14940" t="35345" r="0" b="0"/>
             </a:stretch>
           </a:blipFill>
         </p:spPr>
@@ -3212,20 +3166,19 @@
       </p:sp>
       <p:sp>
         <p:nvSpPr>
-          <p:cNvPr id="5" name="!!BRFan2"/>
+          <p:cNvPr id="4" name="!!TLFan1"/>
           <p:cNvSpPr/>
           <p:nvPr/>
         </p:nvSpPr>
         <p:spPr>
-          <a:xfrm rot="11700000">
-            <a:off x="6888175" y="1554480"/>
-            <a:ext cx="10607040" cy="10607040"/>
-          </a:xfrm>
-          <a:prstGeom prst="blockArc">
+          <a:xfrm>
+            <a:off x="-4389120" y="-4389120"/>
+            <a:ext cx="8778240" cy="8778240"/>
+          </a:xfrm>
+          <a:prstGeom prst="pie">
             <a:avLst>
               <a:gd name="adj1" fmla="val 0"/>
-              <a:gd name="adj2" fmla="val 2500000"/>
-              <a:gd name="adj3" fmla="val 28000"/>
+              <a:gd name="adj2" fmla="val 900000"/>
             </a:avLst>
           </a:prstGeom>
           <a:ln w="9525">
@@ -3236,7 +3189,7 @@
           <a:blipFill rotWithShape="0">
             <a:blip r:embed="rId2"/>
             <a:stretch>
-              <a:fillRect/>
+              <a:fillRect l="50000" t="50000" r="-88885" b="-28125"/>
             </a:stretch>
           </a:blipFill>
         </p:spPr>
@@ -3264,20 +3217,19 @@
       </p:sp>
       <p:sp>
         <p:nvSpPr>
-          <p:cNvPr id="6" name="!!BRFan3"/>
+          <p:cNvPr id="5" name="!!BRFan2"/>
           <p:cNvSpPr/>
           <p:nvPr/>
         </p:nvSpPr>
         <p:spPr>
-          <a:xfrm rot="11700000">
+          <a:xfrm rot="10800000">
             <a:off x="6888175" y="1554480"/>
             <a:ext cx="10607040" cy="10607040"/>
           </a:xfrm>
-          <a:prstGeom prst="blockArc">
+          <a:prstGeom prst="pie">
             <a:avLst>
               <a:gd name="adj1" fmla="val 0"/>
-              <a:gd name="adj2" fmla="val 2500000"/>
-              <a:gd name="adj3" fmla="val 28000"/>
+              <a:gd name="adj2" fmla="val 900000"/>
             </a:avLst>
           </a:prstGeom>
           <a:ln w="9525">
@@ -3288,7 +3240,7 @@
           <a:blipFill rotWithShape="0">
             <a:blip r:embed="rId2"/>
             <a:stretch>
-              <a:fillRect/>
+              <a:fillRect l="-14940" t="35345" r="0" b="0"/>
             </a:stretch>
           </a:blipFill>
         </p:spPr>
@@ -3316,20 +3268,19 @@
       </p:sp>
       <p:sp>
         <p:nvSpPr>
-          <p:cNvPr id="7" name="!!BRFan4"/>
+          <p:cNvPr id="6" name="!!TLFan2"/>
           <p:cNvSpPr/>
           <p:nvPr/>
         </p:nvSpPr>
         <p:spPr>
-          <a:xfrm rot="11700000">
-            <a:off x="6888175" y="1554480"/>
-            <a:ext cx="10607040" cy="10607040"/>
-          </a:xfrm>
-          <a:prstGeom prst="blockArc">
+          <a:xfrm>
+            <a:off x="-4389120" y="-4389120"/>
+            <a:ext cx="8778240" cy="8778240"/>
+          </a:xfrm>
+          <a:prstGeom prst="pie">
             <a:avLst>
               <a:gd name="adj1" fmla="val 0"/>
-              <a:gd name="adj2" fmla="val 2500000"/>
-              <a:gd name="adj3" fmla="val 28000"/>
+              <a:gd name="adj2" fmla="val 900000"/>
             </a:avLst>
           </a:prstGeom>
           <a:ln w="9525">
@@ -3340,7 +3291,7 @@
           <a:blipFill rotWithShape="0">
             <a:blip r:embed="rId2"/>
             <a:stretch>
-              <a:fillRect/>
+              <a:fillRect l="50000" t="50000" r="-88885" b="-28125"/>
             </a:stretch>
           </a:blipFill>
         </p:spPr>
@@ -3368,20 +3319,19 @@
       </p:sp>
       <p:sp>
         <p:nvSpPr>
-          <p:cNvPr id="8" name="!!BRFan5"/>
+          <p:cNvPr id="7" name="!!BRFan3"/>
           <p:cNvSpPr/>
           <p:nvPr/>
         </p:nvSpPr>
         <p:spPr>
-          <a:xfrm rot="11700000">
+          <a:xfrm rot="10800000">
             <a:off x="6888175" y="1554480"/>
             <a:ext cx="10607040" cy="10607040"/>
           </a:xfrm>
-          <a:prstGeom prst="blockArc">
+          <a:prstGeom prst="pie">
             <a:avLst>
               <a:gd name="adj1" fmla="val 0"/>
-              <a:gd name="adj2" fmla="val 2500000"/>
-              <a:gd name="adj3" fmla="val 28000"/>
+              <a:gd name="adj2" fmla="val 900000"/>
             </a:avLst>
           </a:prstGeom>
           <a:ln w="9525">
@@ -3392,7 +3342,7 @@
           <a:blipFill rotWithShape="0">
             <a:blip r:embed="rId2"/>
             <a:stretch>
-              <a:fillRect/>
+              <a:fillRect l="-14940" t="35345" r="0" b="0"/>
             </a:stretch>
           </a:blipFill>
         </p:spPr>
@@ -3420,20 +3370,19 @@
       </p:sp>
       <p:sp>
         <p:nvSpPr>
-          <p:cNvPr id="9" name="!!BRFan6"/>
+          <p:cNvPr id="8" name="!!TLFan3"/>
           <p:cNvSpPr/>
           <p:nvPr/>
         </p:nvSpPr>
         <p:spPr>
-          <a:xfrm rot="11700000">
-            <a:off x="6888175" y="1554480"/>
-            <a:ext cx="10607040" cy="10607040"/>
-          </a:xfrm>
-          <a:prstGeom prst="blockArc">
+          <a:xfrm>
+            <a:off x="-4389120" y="-4389120"/>
+            <a:ext cx="8778240" cy="8778240"/>
+          </a:xfrm>
+          <a:prstGeom prst="pie">
             <a:avLst>
               <a:gd name="adj1" fmla="val 0"/>
-              <a:gd name="adj2" fmla="val 2500000"/>
-              <a:gd name="adj3" fmla="val 28000"/>
+              <a:gd name="adj2" fmla="val 900000"/>
             </a:avLst>
           </a:prstGeom>
           <a:ln w="9525">
@@ -3444,7 +3393,7 @@
           <a:blipFill rotWithShape="0">
             <a:blip r:embed="rId2"/>
             <a:stretch>
-              <a:fillRect/>
+              <a:fillRect l="50000" t="50000" r="-88885" b="-28125"/>
             </a:stretch>
           </a:blipFill>
         </p:spPr>
@@ -3472,20 +3421,19 @@
       </p:sp>
       <p:sp>
         <p:nvSpPr>
-          <p:cNvPr id="10" name="!!TLFan1"/>
+          <p:cNvPr id="9" name="!!BRFan4"/>
           <p:cNvSpPr/>
           <p:nvPr/>
         </p:nvSpPr>
         <p:spPr>
-          <a:xfrm rot="900000">
-            <a:off x="-4389120" y="-4389120"/>
-            <a:ext cx="8778240" cy="8778240"/>
-          </a:xfrm>
-          <a:prstGeom prst="blockArc">
+          <a:xfrm rot="10800000">
+            <a:off x="6888175" y="1554480"/>
+            <a:ext cx="10607040" cy="10607040"/>
+          </a:xfrm>
+          <a:prstGeom prst="pie">
             <a:avLst>
               <a:gd name="adj1" fmla="val 0"/>
-              <a:gd name="adj2" fmla="val 2500000"/>
-              <a:gd name="adj3" fmla="val 28000"/>
+              <a:gd name="adj2" fmla="val 900000"/>
             </a:avLst>
           </a:prstGeom>
           <a:ln w="9525">
@@ -3496,7 +3444,7 @@
           <a:blipFill rotWithShape="0">
             <a:blip r:embed="rId2"/>
             <a:stretch>
-              <a:fillRect/>
+              <a:fillRect l="-14940" t="35345" r="0" b="0"/>
             </a:stretch>
           </a:blipFill>
         </p:spPr>
@@ -3524,20 +3472,19 @@
       </p:sp>
       <p:sp>
         <p:nvSpPr>
-          <p:cNvPr id="11" name="!!TLFan2"/>
+          <p:cNvPr id="10" name="!!TLFan4"/>
           <p:cNvSpPr/>
           <p:nvPr/>
         </p:nvSpPr>
         <p:spPr>
-          <a:xfrm rot="900000">
+          <a:xfrm>
             <a:off x="-4389120" y="-4389120"/>
             <a:ext cx="8778240" cy="8778240"/>
           </a:xfrm>
-          <a:prstGeom prst="blockArc">
+          <a:prstGeom prst="pie">
             <a:avLst>
               <a:gd name="adj1" fmla="val 0"/>
-              <a:gd name="adj2" fmla="val 2500000"/>
-              <a:gd name="adj3" fmla="val 28000"/>
+              <a:gd name="adj2" fmla="val 900000"/>
             </a:avLst>
           </a:prstGeom>
           <a:ln w="9525">
@@ -3548,7 +3495,7 @@
           <a:blipFill rotWithShape="0">
             <a:blip r:embed="rId2"/>
             <a:stretch>
-              <a:fillRect/>
+              <a:fillRect l="50000" t="50000" r="-88885" b="-28125"/>
             </a:stretch>
           </a:blipFill>
         </p:spPr>
@@ -3576,20 +3523,19 @@
       </p:sp>
       <p:sp>
         <p:nvSpPr>
-          <p:cNvPr id="12" name="!!TLFan3"/>
+          <p:cNvPr id="11" name="!!BRFan5"/>
           <p:cNvSpPr/>
           <p:nvPr/>
         </p:nvSpPr>
         <p:spPr>
-          <a:xfrm rot="900000">
-            <a:off x="-4389120" y="-4389120"/>
-            <a:ext cx="8778240" cy="8778240"/>
-          </a:xfrm>
-          <a:prstGeom prst="blockArc">
+          <a:xfrm rot="10800000">
+            <a:off x="6888175" y="1554480"/>
+            <a:ext cx="10607040" cy="10607040"/>
+          </a:xfrm>
+          <a:prstGeom prst="pie">
             <a:avLst>
               <a:gd name="adj1" fmla="val 0"/>
-              <a:gd name="adj2" fmla="val 2500000"/>
-              <a:gd name="adj3" fmla="val 28000"/>
+              <a:gd name="adj2" fmla="val 900000"/>
             </a:avLst>
           </a:prstGeom>
           <a:ln w="9525">
@@ -3600,7 +3546,7 @@
           <a:blipFill rotWithShape="0">
             <a:blip r:embed="rId2"/>
             <a:stretch>
-              <a:fillRect/>
+              <a:fillRect l="-14940" t="35345" r="0" b="0"/>
             </a:stretch>
           </a:blipFill>
         </p:spPr>
@@ -3628,20 +3574,19 @@
       </p:sp>
       <p:sp>
         <p:nvSpPr>
-          <p:cNvPr id="13" name="!!TLFan4"/>
+          <p:cNvPr id="12" name="!!TLFan5"/>
           <p:cNvSpPr/>
           <p:nvPr/>
         </p:nvSpPr>
         <p:spPr>
-          <a:xfrm rot="900000">
+          <a:xfrm>
             <a:off x="-4389120" y="-4389120"/>
             <a:ext cx="8778240" cy="8778240"/>
           </a:xfrm>
-          <a:prstGeom prst="blockArc">
+          <a:prstGeom prst="pie">
             <a:avLst>
               <a:gd name="adj1" fmla="val 0"/>
-              <a:gd name="adj2" fmla="val 2500000"/>
-              <a:gd name="adj3" fmla="val 28000"/>
+              <a:gd name="adj2" fmla="val 900000"/>
             </a:avLst>
           </a:prstGeom>
           <a:ln w="9525">
@@ -3652,7 +3597,7 @@
           <a:blipFill rotWithShape="0">
             <a:blip r:embed="rId2"/>
             <a:stretch>
-              <a:fillRect/>
+              <a:fillRect l="50000" t="50000" r="-88885" b="-28125"/>
             </a:stretch>
           </a:blipFill>
         </p:spPr>
@@ -3680,20 +3625,19 @@
       </p:sp>
       <p:sp>
         <p:nvSpPr>
-          <p:cNvPr id="14" name="!!TLFan5"/>
+          <p:cNvPr id="13" name="!!BRFan6"/>
           <p:cNvSpPr/>
           <p:nvPr/>
         </p:nvSpPr>
         <p:spPr>
-          <a:xfrm rot="900000">
-            <a:off x="-4389120" y="-4389120"/>
-            <a:ext cx="8778240" cy="8778240"/>
-          </a:xfrm>
-          <a:prstGeom prst="blockArc">
+          <a:xfrm rot="10800000">
+            <a:off x="6888175" y="1554480"/>
+            <a:ext cx="10607040" cy="10607040"/>
+          </a:xfrm>
+          <a:prstGeom prst="pie">
             <a:avLst>
               <a:gd name="adj1" fmla="val 0"/>
-              <a:gd name="adj2" fmla="val 2500000"/>
-              <a:gd name="adj3" fmla="val 28000"/>
+              <a:gd name="adj2" fmla="val 900000"/>
             </a:avLst>
           </a:prstGeom>
           <a:ln w="9525">
@@ -3704,7 +3648,7 @@
           <a:blipFill rotWithShape="0">
             <a:blip r:embed="rId2"/>
             <a:stretch>
-              <a:fillRect/>
+              <a:fillRect l="-14940" t="35345" r="0" b="0"/>
             </a:stretch>
           </a:blipFill>
         </p:spPr>
@@ -3732,20 +3676,19 @@
       </p:sp>
       <p:sp>
         <p:nvSpPr>
-          <p:cNvPr id="15" name="!!TLFan6"/>
+          <p:cNvPr id="14" name="!!TLFan6"/>
           <p:cNvSpPr/>
           <p:nvPr/>
         </p:nvSpPr>
         <p:spPr>
-          <a:xfrm rot="900000">
+          <a:xfrm>
             <a:off x="-4389120" y="-4389120"/>
             <a:ext cx="8778240" cy="8778240"/>
           </a:xfrm>
-          <a:prstGeom prst="blockArc">
+          <a:prstGeom prst="pie">
             <a:avLst>
               <a:gd name="adj1" fmla="val 0"/>
-              <a:gd name="adj2" fmla="val 2500000"/>
-              <a:gd name="adj3" fmla="val 28000"/>
+              <a:gd name="adj2" fmla="val 900000"/>
             </a:avLst>
           </a:prstGeom>
           <a:ln w="9525">
@@ -3756,7 +3699,7 @@
           <a:blipFill rotWithShape="0">
             <a:blip r:embed="rId2"/>
             <a:stretch>
-              <a:fillRect/>
+              <a:fillRect l="50000" t="50000" r="-88885" b="-28125"/>
             </a:stretch>
           </a:blipFill>
         </p:spPr>
@@ -3779,209 +3722,6 @@
           <a:lstStyle/>
           <a:p>
             <a:pPr algn="ctr"/>
-          </a:p>
-        </p:txBody>
-      </p:sp>
-      <p:sp>
-        <p:nvSpPr>
-          <p:cNvPr id="16" name="!!JadeBR"/>
-          <p:cNvSpPr/>
-          <p:nvPr/>
-        </p:nvSpPr>
-        <p:spPr>
-          <a:xfrm>
-            <a:off x="11825935" y="6492240"/>
-            <a:ext cx="731520" cy="731520"/>
-          </a:xfrm>
-          <a:prstGeom prst="ellipse">
-            <a:avLst/>
-          </a:prstGeom>
-          <a:solidFill>
-            <a:srgbClr val="F5F8F5"/>
-          </a:solidFill>
-          <a:ln w="19050">
-            <a:solidFill>
-              <a:srgbClr val="D7B97D"/>
-            </a:solidFill>
-          </a:ln>
-        </p:spPr>
-        <p:style>
-          <a:lnRef idx="1">
-            <a:schemeClr val="accent1"/>
-          </a:lnRef>
-          <a:fillRef idx="3">
-            <a:schemeClr val="accent1"/>
-          </a:fillRef>
-          <a:effectRef idx="2">
-            <a:schemeClr val="accent1"/>
-          </a:effectRef>
-          <a:fontRef idx="minor">
-            <a:schemeClr val="lt1"/>
-          </a:fontRef>
-        </p:style>
-        <p:txBody>
-          <a:bodyPr rtlCol="0" anchor="ctr"/>
-          <a:lstStyle/>
-          <a:p>
-            <a:pPr algn="ctr"/>
-          </a:p>
-        </p:txBody>
-      </p:sp>
-      <p:sp>
-        <p:nvSpPr>
-          <p:cNvPr id="17" name="!!JadeTL"/>
-          <p:cNvSpPr/>
-          <p:nvPr/>
-        </p:nvSpPr>
-        <p:spPr>
-          <a:xfrm>
-            <a:off x="-320040" y="-320040"/>
-            <a:ext cx="640080" cy="640080"/>
-          </a:xfrm>
-          <a:prstGeom prst="ellipse">
-            <a:avLst/>
-          </a:prstGeom>
-          <a:solidFill>
-            <a:srgbClr val="F5F8F5"/>
-          </a:solidFill>
-          <a:ln w="19050">
-            <a:solidFill>
-              <a:srgbClr val="D7B97D"/>
-            </a:solidFill>
-          </a:ln>
-        </p:spPr>
-        <p:style>
-          <a:lnRef idx="1">
-            <a:schemeClr val="accent1"/>
-          </a:lnRef>
-          <a:fillRef idx="3">
-            <a:schemeClr val="accent1"/>
-          </a:fillRef>
-          <a:effectRef idx="2">
-            <a:schemeClr val="accent1"/>
-          </a:effectRef>
-          <a:fontRef idx="minor">
-            <a:schemeClr val="lt1"/>
-          </a:fontRef>
-        </p:style>
-        <p:txBody>
-          <a:bodyPr rtlCol="0" anchor="ctr"/>
-          <a:lstStyle/>
-          <a:p>
-            <a:pPr algn="ctr"/>
-          </a:p>
-        </p:txBody>
-      </p:sp>
-      <p:sp>
-        <p:nvSpPr>
-          <p:cNvPr id="18" name="!!MainTitle"/>
-          <p:cNvSpPr txBox="1"/>
-          <p:nvPr/>
-        </p:nvSpPr>
-        <p:spPr>
-          <a:xfrm>
-            <a:off x="2926080" y="-2743200"/>
-            <a:ext cx="6400800" cy="1645920"/>
-          </a:xfrm>
-          <a:prstGeom prst="rect">
-            <a:avLst/>
-          </a:prstGeom>
-          <a:noFill/>
-        </p:spPr>
-        <p:txBody>
-          <a:bodyPr wrap="none">
-            <a:spAutoFit/>
-          </a:bodyPr>
-          <a:lstStyle/>
-          <a:p>
-            <a:pPr algn="ctr">
-              <a:defRPr sz="6000" b="1">
-                <a:solidFill>
-                  <a:srgbClr val="162414"/>
-                </a:solidFill>
-              </a:defRPr>
-            </a:pPr>
-            <a:r>
-              <a:t>春   天   序</a:t>
-            </a:r>
-          </a:p>
-        </p:txBody>
-      </p:sp>
-      <p:sp>
-        <p:nvSpPr>
-          <p:cNvPr id="19" name="!!SubTitle"/>
-          <p:cNvSpPr txBox="1"/>
-          <p:nvPr/>
-        </p:nvSpPr>
-        <p:spPr>
-          <a:xfrm>
-            <a:off x="2926080" y="-1097280"/>
-            <a:ext cx="6400800" cy="731520"/>
-          </a:xfrm>
-          <a:prstGeom prst="rect">
-            <a:avLst/>
-          </a:prstGeom>
-          <a:noFill/>
-        </p:spPr>
-        <p:txBody>
-          <a:bodyPr wrap="none">
-            <a:spAutoFit/>
-          </a:bodyPr>
-          <a:lstStyle/>
-          <a:p>
-            <a:pPr algn="ctr">
-              <a:defRPr sz="1800">
-                <a:solidFill>
-                  <a:srgbClr val="5A7355"/>
-                </a:solidFill>
-              </a:defRPr>
-            </a:pPr>
-            <a:r>
-              <a:t>Spring  ·  2026</a:t>
-            </a:r>
-          </a:p>
-        </p:txBody>
-      </p:sp>
-      <p:sp>
-        <p:nvSpPr>
-          <p:cNvPr id="20" name="!!QuoteText"/>
-          <p:cNvSpPr txBox="1"/>
-          <p:nvPr/>
-        </p:nvSpPr>
-        <p:spPr>
-          <a:xfrm>
-            <a:off x="2926080" y="7772400"/>
-            <a:ext cx="6400800" cy="1463040"/>
-          </a:xfrm>
-          <a:prstGeom prst="rect">
-            <a:avLst/>
-          </a:prstGeom>
-          <a:noFill/>
-        </p:spPr>
-        <p:txBody>
-          <a:bodyPr wrap="none">
-            <a:spAutoFit/>
-          </a:bodyPr>
-          <a:lstStyle/>
-          <a:p>
-            <a:pPr algn="ctr">
-              <a:defRPr sz="1600">
-                <a:solidFill>
-                  <a:srgbClr val="374B32"/>
-                </a:solidFill>
-              </a:defRPr>
-            </a:pPr>
-            <a:r>
-              <a:t>当折扇与微风相遇，</a:t>
-            </a:r>
-            <a:br/>
-            <a:r>
-              <a:t>春天便有了具象的模样，</a:t>
-            </a:r>
-            <a:br/>
-            <a:r>
-              <a:t>愿日子清透，万事皆有生机。</a:t>
-            </a:r>
           </a:p>
         </p:txBody>
       </p:sp>
@@ -4046,7 +3786,7 @@
           </a:ln>
           <a:solidFill>
             <a:srgbClr val="F8FAF6">
-              <a:alpha val="35000"/>
+              <a:alpha val="20000"/>
             </a:srgbClr>
           </a:solidFill>
         </p:spPr>
@@ -4079,15 +3819,14 @@
           <p:nvPr/>
         </p:nvSpPr>
         <p:spPr>
-          <a:xfrm rot="16200000">
+          <a:xfrm rot="15300000">
             <a:off x="6888175" y="1554480"/>
             <a:ext cx="10607040" cy="10607040"/>
           </a:xfrm>
-          <a:prstGeom prst="blockArc">
+          <a:prstGeom prst="pie">
             <a:avLst>
               <a:gd name="adj1" fmla="val 0"/>
-              <a:gd name="adj2" fmla="val 2500000"/>
-              <a:gd name="adj3" fmla="val 28000"/>
+              <a:gd name="adj2" fmla="val 900000"/>
             </a:avLst>
           </a:prstGeom>
           <a:ln w="9525">
@@ -4098,7 +3837,7 @@
           <a:blipFill rotWithShape="0">
             <a:blip r:embed="rId2"/>
             <a:stretch>
-              <a:fillRect/>
+              <a:fillRect l="-14940" t="35345" r="0" b="0"/>
             </a:stretch>
           </a:blipFill>
           <a:effectLst>
@@ -4138,15 +3877,14 @@
           <p:nvPr/>
         </p:nvSpPr>
         <p:spPr>
-          <a:xfrm rot="15300000">
+          <a:xfrm rot="14400000">
             <a:off x="6888175" y="1554480"/>
             <a:ext cx="10607040" cy="10607040"/>
           </a:xfrm>
-          <a:prstGeom prst="blockArc">
+          <a:prstGeom prst="pie">
             <a:avLst>
               <a:gd name="adj1" fmla="val 0"/>
-              <a:gd name="adj2" fmla="val 2500000"/>
-              <a:gd name="adj3" fmla="val 28000"/>
+              <a:gd name="adj2" fmla="val 900000"/>
             </a:avLst>
           </a:prstGeom>
           <a:ln w="9525">
@@ -4157,7 +3895,7 @@
           <a:blipFill rotWithShape="0">
             <a:blip r:embed="rId2"/>
             <a:stretch>
-              <a:fillRect/>
+              <a:fillRect l="-14940" t="35345" r="0" b="0"/>
             </a:stretch>
           </a:blipFill>
           <a:effectLst>
@@ -4197,15 +3935,14 @@
           <p:nvPr/>
         </p:nvSpPr>
         <p:spPr>
-          <a:xfrm rot="14400000">
+          <a:xfrm rot="13500000">
             <a:off x="6888175" y="1554480"/>
             <a:ext cx="10607040" cy="10607040"/>
           </a:xfrm>
-          <a:prstGeom prst="blockArc">
+          <a:prstGeom prst="pie">
             <a:avLst>
               <a:gd name="adj1" fmla="val 0"/>
-              <a:gd name="adj2" fmla="val 2500000"/>
-              <a:gd name="adj3" fmla="val 28000"/>
+              <a:gd name="adj2" fmla="val 900000"/>
             </a:avLst>
           </a:prstGeom>
           <a:ln w="9525">
@@ -4216,7 +3953,7 @@
           <a:blipFill rotWithShape="0">
             <a:blip r:embed="rId2"/>
             <a:stretch>
-              <a:fillRect/>
+              <a:fillRect l="-14940" t="35345" r="0" b="0"/>
             </a:stretch>
           </a:blipFill>
           <a:effectLst>
@@ -4256,15 +3993,14 @@
           <p:nvPr/>
         </p:nvSpPr>
         <p:spPr>
-          <a:xfrm rot="13500000">
+          <a:xfrm rot="12600000">
             <a:off x="6888175" y="1554480"/>
             <a:ext cx="10607040" cy="10607040"/>
           </a:xfrm>
-          <a:prstGeom prst="blockArc">
+          <a:prstGeom prst="pie">
             <a:avLst>
               <a:gd name="adj1" fmla="val 0"/>
-              <a:gd name="adj2" fmla="val 2500000"/>
-              <a:gd name="adj3" fmla="val 28000"/>
+              <a:gd name="adj2" fmla="val 900000"/>
             </a:avLst>
           </a:prstGeom>
           <a:ln w="9525">
@@ -4275,7 +4011,7 @@
           <a:blipFill rotWithShape="0">
             <a:blip r:embed="rId2"/>
             <a:stretch>
-              <a:fillRect/>
+              <a:fillRect l="-14940" t="35345" r="0" b="0"/>
             </a:stretch>
           </a:blipFill>
           <a:effectLst>
@@ -4315,15 +4051,14 @@
           <p:nvPr/>
         </p:nvSpPr>
         <p:spPr>
-          <a:xfrm rot="12600000">
+          <a:xfrm rot="11700000">
             <a:off x="6888175" y="1554480"/>
             <a:ext cx="10607040" cy="10607040"/>
           </a:xfrm>
-          <a:prstGeom prst="blockArc">
+          <a:prstGeom prst="pie">
             <a:avLst>
               <a:gd name="adj1" fmla="val 0"/>
-              <a:gd name="adj2" fmla="val 2500000"/>
-              <a:gd name="adj3" fmla="val 28000"/>
+              <a:gd name="adj2" fmla="val 900000"/>
             </a:avLst>
           </a:prstGeom>
           <a:ln w="9525">
@@ -4334,7 +4069,7 @@
           <a:blipFill rotWithShape="0">
             <a:blip r:embed="rId2"/>
             <a:stretch>
-              <a:fillRect/>
+              <a:fillRect l="-14940" t="35345" r="0" b="0"/>
             </a:stretch>
           </a:blipFill>
           <a:effectLst>
@@ -4374,15 +4109,14 @@
           <p:nvPr/>
         </p:nvSpPr>
         <p:spPr>
-          <a:xfrm rot="11700000">
+          <a:xfrm rot="10800000">
             <a:off x="6888175" y="1554480"/>
             <a:ext cx="10607040" cy="10607040"/>
           </a:xfrm>
-          <a:prstGeom prst="blockArc">
+          <a:prstGeom prst="pie">
             <a:avLst>
               <a:gd name="adj1" fmla="val 0"/>
-              <a:gd name="adj2" fmla="val 2500000"/>
-              <a:gd name="adj3" fmla="val 28000"/>
+              <a:gd name="adj2" fmla="val 900000"/>
             </a:avLst>
           </a:prstGeom>
           <a:ln w="9525">
@@ -4393,7 +4127,7 @@
           <a:blipFill rotWithShape="0">
             <a:blip r:embed="rId2"/>
             <a:stretch>
-              <a:fillRect/>
+              <a:fillRect l="-14940" t="35345" r="0" b="0"/>
             </a:stretch>
           </a:blipFill>
           <a:effectLst>
@@ -4433,15 +4167,14 @@
           <p:nvPr/>
         </p:nvSpPr>
         <p:spPr>
-          <a:xfrm rot="5400000">
+          <a:xfrm rot="4500000">
             <a:off x="-4389120" y="-4389120"/>
             <a:ext cx="8778240" cy="8778240"/>
           </a:xfrm>
-          <a:prstGeom prst="blockArc">
+          <a:prstGeom prst="pie">
             <a:avLst>
               <a:gd name="adj1" fmla="val 0"/>
-              <a:gd name="adj2" fmla="val 2500000"/>
-              <a:gd name="adj3" fmla="val 28000"/>
+              <a:gd name="adj2" fmla="val 900000"/>
             </a:avLst>
           </a:prstGeom>
           <a:ln w="9525">
@@ -4452,7 +4185,7 @@
           <a:blipFill rotWithShape="0">
             <a:blip r:embed="rId2"/>
             <a:stretch>
-              <a:fillRect/>
+              <a:fillRect l="50000" t="50000" r="-88885" b="-28125"/>
             </a:stretch>
           </a:blipFill>
           <a:effectLst>
@@ -4492,15 +4225,14 @@
           <p:nvPr/>
         </p:nvSpPr>
         <p:spPr>
-          <a:xfrm rot="4500000">
+          <a:xfrm rot="3600000">
             <a:off x="-4389120" y="-4389120"/>
             <a:ext cx="8778240" cy="8778240"/>
           </a:xfrm>
-          <a:prstGeom prst="blockArc">
+          <a:prstGeom prst="pie">
             <a:avLst>
               <a:gd name="adj1" fmla="val 0"/>
-              <a:gd name="adj2" fmla="val 2500000"/>
-              <a:gd name="adj3" fmla="val 28000"/>
+              <a:gd name="adj2" fmla="val 900000"/>
             </a:avLst>
           </a:prstGeom>
           <a:ln w="9525">
@@ -4511,7 +4243,7 @@
           <a:blipFill rotWithShape="0">
             <a:blip r:embed="rId2"/>
             <a:stretch>
-              <a:fillRect/>
+              <a:fillRect l="50000" t="50000" r="-88885" b="-28125"/>
             </a:stretch>
           </a:blipFill>
           <a:effectLst>
@@ -4551,15 +4283,14 @@
           <p:nvPr/>
         </p:nvSpPr>
         <p:spPr>
-          <a:xfrm rot="3600000">
+          <a:xfrm rot="2700000">
             <a:off x="-4389120" y="-4389120"/>
             <a:ext cx="8778240" cy="8778240"/>
           </a:xfrm>
-          <a:prstGeom prst="blockArc">
+          <a:prstGeom prst="pie">
             <a:avLst>
               <a:gd name="adj1" fmla="val 0"/>
-              <a:gd name="adj2" fmla="val 2500000"/>
-              <a:gd name="adj3" fmla="val 28000"/>
+              <a:gd name="adj2" fmla="val 900000"/>
             </a:avLst>
           </a:prstGeom>
           <a:ln w="9525">
@@ -4570,7 +4301,7 @@
           <a:blipFill rotWithShape="0">
             <a:blip r:embed="rId2"/>
             <a:stretch>
-              <a:fillRect/>
+              <a:fillRect l="50000" t="50000" r="-88885" b="-28125"/>
             </a:stretch>
           </a:blipFill>
           <a:effectLst>
@@ -4610,15 +4341,14 @@
           <p:nvPr/>
         </p:nvSpPr>
         <p:spPr>
-          <a:xfrm rot="2700000">
+          <a:xfrm rot="1800000">
             <a:off x="-4389120" y="-4389120"/>
             <a:ext cx="8778240" cy="8778240"/>
           </a:xfrm>
-          <a:prstGeom prst="blockArc">
+          <a:prstGeom prst="pie">
             <a:avLst>
               <a:gd name="adj1" fmla="val 0"/>
-              <a:gd name="adj2" fmla="val 2500000"/>
-              <a:gd name="adj3" fmla="val 28000"/>
+              <a:gd name="adj2" fmla="val 900000"/>
             </a:avLst>
           </a:prstGeom>
           <a:ln w="9525">
@@ -4629,7 +4359,7 @@
           <a:blipFill rotWithShape="0">
             <a:blip r:embed="rId2"/>
             <a:stretch>
-              <a:fillRect/>
+              <a:fillRect l="50000" t="50000" r="-88885" b="-28125"/>
             </a:stretch>
           </a:blipFill>
           <a:effectLst>
@@ -4669,15 +4399,14 @@
           <p:nvPr/>
         </p:nvSpPr>
         <p:spPr>
-          <a:xfrm rot="1800000">
+          <a:xfrm rot="900000">
             <a:off x="-4389120" y="-4389120"/>
             <a:ext cx="8778240" cy="8778240"/>
           </a:xfrm>
-          <a:prstGeom prst="blockArc">
+          <a:prstGeom prst="pie">
             <a:avLst>
               <a:gd name="adj1" fmla="val 0"/>
-              <a:gd name="adj2" fmla="val 2500000"/>
-              <a:gd name="adj3" fmla="val 28000"/>
+              <a:gd name="adj2" fmla="val 900000"/>
             </a:avLst>
           </a:prstGeom>
           <a:ln w="9525">
@@ -4688,7 +4417,7 @@
           <a:blipFill rotWithShape="0">
             <a:blip r:embed="rId2"/>
             <a:stretch>
-              <a:fillRect/>
+              <a:fillRect l="50000" t="50000" r="-88885" b="-28125"/>
             </a:stretch>
           </a:blipFill>
           <a:effectLst>
@@ -4728,15 +4457,14 @@
           <p:nvPr/>
         </p:nvSpPr>
         <p:spPr>
-          <a:xfrm rot="900000">
+          <a:xfrm>
             <a:off x="-4389120" y="-4389120"/>
             <a:ext cx="8778240" cy="8778240"/>
           </a:xfrm>
-          <a:prstGeom prst="blockArc">
+          <a:prstGeom prst="pie">
             <a:avLst>
               <a:gd name="adj1" fmla="val 0"/>
-              <a:gd name="adj2" fmla="val 2500000"/>
-              <a:gd name="adj3" fmla="val 28000"/>
+              <a:gd name="adj2" fmla="val 900000"/>
             </a:avLst>
           </a:prstGeom>
           <a:ln w="9525">
@@ -4747,7 +4475,7 @@
           <a:blipFill rotWithShape="0">
             <a:blip r:embed="rId2"/>
             <a:stretch>
-              <a:fillRect/>
+              <a:fillRect l="50000" t="50000" r="-88885" b="-28125"/>
             </a:stretch>
           </a:blipFill>
           <a:effectLst>
@@ -4782,104 +4510,14 @@
       </p:sp>
       <p:sp>
         <p:nvSpPr>
-          <p:cNvPr id="16" name="!!JadeBR"/>
-          <p:cNvSpPr/>
-          <p:nvPr/>
-        </p:nvSpPr>
-        <p:spPr>
-          <a:xfrm>
-            <a:off x="11825935" y="6492240"/>
-            <a:ext cx="731520" cy="731520"/>
-          </a:xfrm>
-          <a:prstGeom prst="ellipse">
-            <a:avLst/>
-          </a:prstGeom>
-          <a:solidFill>
-            <a:srgbClr val="F5F8F5"/>
-          </a:solidFill>
-          <a:ln w="19050">
-            <a:solidFill>
-              <a:srgbClr val="D7B97D"/>
-            </a:solidFill>
-          </a:ln>
-        </p:spPr>
-        <p:style>
-          <a:lnRef idx="1">
-            <a:schemeClr val="accent1"/>
-          </a:lnRef>
-          <a:fillRef idx="3">
-            <a:schemeClr val="accent1"/>
-          </a:fillRef>
-          <a:effectRef idx="2">
-            <a:schemeClr val="accent1"/>
-          </a:effectRef>
-          <a:fontRef idx="minor">
-            <a:schemeClr val="lt1"/>
-          </a:fontRef>
-        </p:style>
-        <p:txBody>
-          <a:bodyPr rtlCol="0" anchor="ctr"/>
-          <a:lstStyle/>
-          <a:p>
-            <a:pPr algn="ctr"/>
-          </a:p>
-        </p:txBody>
-      </p:sp>
-      <p:sp>
-        <p:nvSpPr>
-          <p:cNvPr id="17" name="!!JadeTL"/>
-          <p:cNvSpPr/>
-          <p:nvPr/>
-        </p:nvSpPr>
-        <p:spPr>
-          <a:xfrm>
-            <a:off x="-320040" y="-320040"/>
-            <a:ext cx="640080" cy="640080"/>
-          </a:xfrm>
-          <a:prstGeom prst="ellipse">
-            <a:avLst/>
-          </a:prstGeom>
-          <a:solidFill>
-            <a:srgbClr val="F5F8F5"/>
-          </a:solidFill>
-          <a:ln w="19050">
-            <a:solidFill>
-              <a:srgbClr val="D7B97D"/>
-            </a:solidFill>
-          </a:ln>
-        </p:spPr>
-        <p:style>
-          <a:lnRef idx="1">
-            <a:schemeClr val="accent1"/>
-          </a:lnRef>
-          <a:fillRef idx="3">
-            <a:schemeClr val="accent1"/>
-          </a:fillRef>
-          <a:effectRef idx="2">
-            <a:schemeClr val="accent1"/>
-          </a:effectRef>
-          <a:fontRef idx="minor">
-            <a:schemeClr val="lt1"/>
-          </a:fontRef>
-        </p:style>
-        <p:txBody>
-          <a:bodyPr rtlCol="0" anchor="ctr"/>
-          <a:lstStyle/>
-          <a:p>
-            <a:pPr algn="ctr"/>
-          </a:p>
-        </p:txBody>
-      </p:sp>
-      <p:sp>
-        <p:nvSpPr>
-          <p:cNvPr id="18" name="!!MainTitle"/>
+          <p:cNvPr id="16" name="!!MainTitle"/>
           <p:cNvSpPr txBox="1"/>
           <p:nvPr/>
         </p:nvSpPr>
         <p:spPr>
           <a:xfrm>
-            <a:off x="2926080" y="1645920"/>
-            <a:ext cx="6400800" cy="1645920"/>
+            <a:off x="2926080" y="1737360"/>
+            <a:ext cx="6400800" cy="1463040"/>
           </a:xfrm>
           <a:prstGeom prst="rect">
             <a:avLst/>
@@ -4893,7 +4531,7 @@
           <a:lstStyle/>
           <a:p>
             <a:pPr algn="ctr">
-              <a:defRPr sz="6000" b="1">
+              <a:defRPr sz="5400" b="1">
                 <a:solidFill>
                   <a:srgbClr val="162414"/>
                 </a:solidFill>
@@ -4907,14 +4545,14 @@
       </p:sp>
       <p:sp>
         <p:nvSpPr>
-          <p:cNvPr id="19" name="!!SubTitle"/>
+          <p:cNvPr id="17" name="!!SubTitle"/>
           <p:cNvSpPr txBox="1"/>
           <p:nvPr/>
         </p:nvSpPr>
         <p:spPr>
           <a:xfrm>
-            <a:off x="2926080" y="2926080"/>
-            <a:ext cx="6400800" cy="731520"/>
+            <a:off x="2926080" y="2880360"/>
+            <a:ext cx="6400800" cy="1463040"/>
           </a:xfrm>
           <a:prstGeom prst="rect">
             <a:avLst/>
@@ -4928,7 +4566,7 @@
           <a:lstStyle/>
           <a:p>
             <a:pPr algn="ctr">
-              <a:defRPr sz="1800">
+              <a:defRPr sz="1800" b="0">
                 <a:solidFill>
                   <a:srgbClr val="5A7355"/>
                 </a:solidFill>
@@ -4942,13 +4580,13 @@
       </p:sp>
       <p:sp>
         <p:nvSpPr>
-          <p:cNvPr id="20" name="!!QuoteText"/>
+          <p:cNvPr id="18" name="!!QuoteText"/>
           <p:cNvSpPr txBox="1"/>
           <p:nvPr/>
         </p:nvSpPr>
         <p:spPr>
           <a:xfrm>
-            <a:off x="2926080" y="3840480"/>
+            <a:off x="2926080" y="3703320"/>
             <a:ext cx="6400800" cy="1463040"/>
           </a:xfrm>
           <a:prstGeom prst="rect">
@@ -4963,7 +4601,7 @@
           <a:lstStyle/>
           <a:p>
             <a:pPr algn="ctr">
-              <a:defRPr sz="1600">
+              <a:defRPr sz="1600" b="0">
                 <a:solidFill>
                   <a:srgbClr val="374B32"/>
                 </a:solidFill>

--- a/knowledge/Productivity/Fan_Ceiling_Showcase.pptx
+++ b/knowledge/Productivity/Fan_Ceiling_Showcase.pptx
@@ -3130,7 +3130,7 @@
               <a:gd name="adj2" fmla="val 900000"/>
             </a:avLst>
           </a:prstGeom>
-          <a:ln w="9525">
+          <a:ln w="1905">
             <a:solidFill>
               <a:srgbClr val="D7B97D"/>
             </a:solidFill>
@@ -3181,7 +3181,7 @@
               <a:gd name="adj2" fmla="val 900000"/>
             </a:avLst>
           </a:prstGeom>
-          <a:ln w="9525">
+          <a:ln w="1905">
             <a:solidFill>
               <a:srgbClr val="D7B97D"/>
             </a:solidFill>
@@ -3232,7 +3232,7 @@
               <a:gd name="adj2" fmla="val 900000"/>
             </a:avLst>
           </a:prstGeom>
-          <a:ln w="9525">
+          <a:ln w="1905">
             <a:solidFill>
               <a:srgbClr val="D7B97D"/>
             </a:solidFill>
@@ -3283,7 +3283,7 @@
               <a:gd name="adj2" fmla="val 900000"/>
             </a:avLst>
           </a:prstGeom>
-          <a:ln w="9525">
+          <a:ln w="1905">
             <a:solidFill>
               <a:srgbClr val="D7B97D"/>
             </a:solidFill>
@@ -3334,7 +3334,7 @@
               <a:gd name="adj2" fmla="val 900000"/>
             </a:avLst>
           </a:prstGeom>
-          <a:ln w="9525">
+          <a:ln w="1905">
             <a:solidFill>
               <a:srgbClr val="D7B97D"/>
             </a:solidFill>
@@ -3385,7 +3385,7 @@
               <a:gd name="adj2" fmla="val 900000"/>
             </a:avLst>
           </a:prstGeom>
-          <a:ln w="9525">
+          <a:ln w="1905">
             <a:solidFill>
               <a:srgbClr val="D7B97D"/>
             </a:solidFill>
@@ -3436,7 +3436,7 @@
               <a:gd name="adj2" fmla="val 900000"/>
             </a:avLst>
           </a:prstGeom>
-          <a:ln w="9525">
+          <a:ln w="1905">
             <a:solidFill>
               <a:srgbClr val="D7B97D"/>
             </a:solidFill>
@@ -3487,7 +3487,7 @@
               <a:gd name="adj2" fmla="val 900000"/>
             </a:avLst>
           </a:prstGeom>
-          <a:ln w="9525">
+          <a:ln w="1905">
             <a:solidFill>
               <a:srgbClr val="D7B97D"/>
             </a:solidFill>
@@ -3538,7 +3538,7 @@
               <a:gd name="adj2" fmla="val 900000"/>
             </a:avLst>
           </a:prstGeom>
-          <a:ln w="9525">
+          <a:ln w="1905">
             <a:solidFill>
               <a:srgbClr val="D7B97D"/>
             </a:solidFill>
@@ -3589,7 +3589,7 @@
               <a:gd name="adj2" fmla="val 900000"/>
             </a:avLst>
           </a:prstGeom>
-          <a:ln w="9525">
+          <a:ln w="1905">
             <a:solidFill>
               <a:srgbClr val="D7B97D"/>
             </a:solidFill>
@@ -3640,7 +3640,7 @@
               <a:gd name="adj2" fmla="val 900000"/>
             </a:avLst>
           </a:prstGeom>
-          <a:ln w="9525">
+          <a:ln w="1905">
             <a:solidFill>
               <a:srgbClr val="D7B97D"/>
             </a:solidFill>
@@ -3691,7 +3691,7 @@
               <a:gd name="adj2" fmla="val 900000"/>
             </a:avLst>
           </a:prstGeom>
-          <a:ln w="9525">
+          <a:ln w="1905">
             <a:solidFill>
               <a:srgbClr val="D7B97D"/>
             </a:solidFill>
@@ -3829,7 +3829,7 @@
               <a:gd name="adj2" fmla="val 900000"/>
             </a:avLst>
           </a:prstGeom>
-          <a:ln w="9525">
+          <a:ln w="1905">
             <a:solidFill>
               <a:srgbClr val="D7B97D"/>
             </a:solidFill>
@@ -3887,7 +3887,7 @@
               <a:gd name="adj2" fmla="val 900000"/>
             </a:avLst>
           </a:prstGeom>
-          <a:ln w="9525">
+          <a:ln w="1905">
             <a:solidFill>
               <a:srgbClr val="D7B97D"/>
             </a:solidFill>
@@ -3945,7 +3945,7 @@
               <a:gd name="adj2" fmla="val 900000"/>
             </a:avLst>
           </a:prstGeom>
-          <a:ln w="9525">
+          <a:ln w="1905">
             <a:solidFill>
               <a:srgbClr val="D7B97D"/>
             </a:solidFill>
@@ -4003,7 +4003,7 @@
               <a:gd name="adj2" fmla="val 900000"/>
             </a:avLst>
           </a:prstGeom>
-          <a:ln w="9525">
+          <a:ln w="1905">
             <a:solidFill>
               <a:srgbClr val="D7B97D"/>
             </a:solidFill>
@@ -4061,7 +4061,7 @@
               <a:gd name="adj2" fmla="val 900000"/>
             </a:avLst>
           </a:prstGeom>
-          <a:ln w="9525">
+          <a:ln w="1905">
             <a:solidFill>
               <a:srgbClr val="D7B97D"/>
             </a:solidFill>
@@ -4119,7 +4119,7 @@
               <a:gd name="adj2" fmla="val 900000"/>
             </a:avLst>
           </a:prstGeom>
-          <a:ln w="9525">
+          <a:ln w="1905">
             <a:solidFill>
               <a:srgbClr val="D7B97D"/>
             </a:solidFill>
@@ -4177,7 +4177,7 @@
               <a:gd name="adj2" fmla="val 900000"/>
             </a:avLst>
           </a:prstGeom>
-          <a:ln w="9525">
+          <a:ln w="1905">
             <a:solidFill>
               <a:srgbClr val="D7B97D"/>
             </a:solidFill>
@@ -4235,7 +4235,7 @@
               <a:gd name="adj2" fmla="val 900000"/>
             </a:avLst>
           </a:prstGeom>
-          <a:ln w="9525">
+          <a:ln w="1905">
             <a:solidFill>
               <a:srgbClr val="D7B97D"/>
             </a:solidFill>
@@ -4293,7 +4293,7 @@
               <a:gd name="adj2" fmla="val 900000"/>
             </a:avLst>
           </a:prstGeom>
-          <a:ln w="9525">
+          <a:ln w="1905">
             <a:solidFill>
               <a:srgbClr val="D7B97D"/>
             </a:solidFill>
@@ -4351,7 +4351,7 @@
               <a:gd name="adj2" fmla="val 900000"/>
             </a:avLst>
           </a:prstGeom>
-          <a:ln w="9525">
+          <a:ln w="1905">
             <a:solidFill>
               <a:srgbClr val="D7B97D"/>
             </a:solidFill>
@@ -4409,7 +4409,7 @@
               <a:gd name="adj2" fmla="val 900000"/>
             </a:avLst>
           </a:prstGeom>
-          <a:ln w="9525">
+          <a:ln w="1905">
             <a:solidFill>
               <a:srgbClr val="D7B97D"/>
             </a:solidFill>
@@ -4467,7 +4467,7 @@
               <a:gd name="adj2" fmla="val 900000"/>
             </a:avLst>
           </a:prstGeom>
-          <a:ln w="9525">
+          <a:ln w="1905">
             <a:solidFill>
               <a:srgbClr val="D7B97D"/>
             </a:solidFill>
